--- a/classes/parte-0-fundamentos-y-prerrequisitos/023-sistemas-operativos-procesos-memoria-y-syscalls/clase-023-presentacion.pptx
+++ b/classes/parte-0-fundamentos-y-prerrequisitos/023-sistemas-operativos-procesos-memoria-y-syscalls/clase-023-presentacion.pptx
@@ -17,6 +17,11 @@
     <p:sldId id="265" r:id="rId16"/>
     <p:sldId id="266" r:id="rId17"/>
     <p:sldId id="267" r:id="rId18"/>
+    <p:sldId id="268" r:id="rId19"/>
+    <p:sldId id="269" r:id="rId20"/>
+    <p:sldId id="270" r:id="rId21"/>
+    <p:sldId id="271" r:id="rId22"/>
+    <p:sldId id="272" r:id="rId23"/>
   </p:sldIdLst>
   <p:sldSz cx="9144000" cy="6858000" type="screen4x3"/>
   <p:notesSz cx="6858000" cy="9144000"/>
@@ -3198,7 +3203,7 @@
                   <a:srgbClr val="0B3D2E"/>
                 </a:solidFill>
               </a:rPr>
-              <a:t>⚠️ Errores comunes</a:t>
+              <a:t>✍️ Ejercicios</a:t>
             </a:r>
           </a:p>
         </p:txBody>
@@ -3236,67 +3241,97 @@
                   <a:srgbClr val="22282E"/>
                 </a:solidFill>
               </a:rPr>
-              <a:t>•  strace: Operation not permitted — Restricciones de ptrace o proceso ajeno. Traza procesos propios o ajusta ptracescope.</a:t>
-            </a:r>
-          </a:p>
-          <a:p>
-            <a:pPr>
-              <a:spcAft>
-                <a:spcPts val="600"/>
-              </a:spcAft>
-            </a:pPr>
-            <a:r>
-              <a:rPr sz="1500">
-                <a:solidFill>
-                  <a:srgbClr val="22282E"/>
-                </a:solidFill>
-              </a:rPr>
-              <a:t>•  ltrace no muestra nada — Binario estático o sin símbolos. ltrace necesita enlace dinámico.</a:t>
-            </a:r>
-          </a:p>
-          <a:p>
-            <a:pPr>
-              <a:spcAft>
-                <a:spcPts val="600"/>
-              </a:spcAft>
-            </a:pPr>
-            <a:r>
-              <a:rPr sz="1500">
-                <a:solidFill>
-                  <a:srgbClr val="22282E"/>
-                </a:solidFill>
-              </a:rPr>
-              <a:t>•  /proc/&lt;pid&gt;/maps vacío o denegado — Permisos o el proceso terminó. Usa un PID vivo y propio.</a:t>
-            </a:r>
-          </a:p>
-          <a:p>
-            <a:pPr>
-              <a:spcAft>
-                <a:spcPts val="600"/>
-              </a:spcAft>
-            </a:pPr>
-            <a:r>
-              <a:rPr sz="1500">
-                <a:solidFill>
-                  <a:srgbClr val="22282E"/>
-                </a:solidFill>
-              </a:rPr>
-              <a:t>•  Confundir stack con heap — Stack = automático/LIFO; heap = dinámico (malloc). Revisa el layout.</a:t>
-            </a:r>
-          </a:p>
-          <a:p>
-            <a:pPr>
-              <a:spcAft>
-                <a:spcPts val="600"/>
-              </a:spcAft>
-            </a:pPr>
-            <a:r>
-              <a:rPr sz="1500">
-                <a:solidFill>
-                  <a:srgbClr val="22282E"/>
-                </a:solidFill>
-              </a:rPr>
-              <a:t>•  strace ralentiza mucho el programa — Es normal: intercepta cada syscall. Filtra con -e trace= para reducir ruido.</a:t>
+              <a:t>•  Dibuja el layout de memoria de un proceso e indica en qué región vive cada tipo de dato (código, globales, memoria dinámica, variables locales).</a:t>
+            </a:r>
+          </a:p>
+          <a:p>
+            <a:pPr>
+              <a:spcAft>
+                <a:spcPts val="600"/>
+              </a:spcAft>
+            </a:pPr>
+            <a:r>
+              <a:rPr sz="1500">
+                <a:solidFill>
+                  <a:srgbClr val="22282E"/>
+                </a:solidFill>
+              </a:rPr>
+              <a:t>•  Explica la diferencia entre un proceso y un hilo, y da una implicación de seguridad concreta de cada uno.</a:t>
+            </a:r>
+          </a:p>
+          <a:p>
+            <a:pPr>
+              <a:spcAft>
+                <a:spcPts val="600"/>
+              </a:spcAft>
+            </a:pPr>
+            <a:r>
+              <a:rPr sz="1500">
+                <a:solidFill>
+                  <a:srgbClr val="22282E"/>
+                </a:solidFill>
+              </a:rPr>
+              <a:t>•  Con strace, identifica todas las syscalls que usa un programa para leer un archivo, desde que lo abre hasta que lo cierra.</a:t>
+            </a:r>
+          </a:p>
+          <a:p>
+            <a:pPr>
+              <a:spcAft>
+                <a:spcPts val="600"/>
+              </a:spcAft>
+            </a:pPr>
+            <a:r>
+              <a:rPr sz="1500">
+                <a:solidFill>
+                  <a:srgbClr val="22282E"/>
+                </a:solidFill>
+              </a:rPr>
+              <a:t>•  Investiga qué es una interrupción o trap y cómo transfiere el control desde modo usuario al kernel.</a:t>
+            </a:r>
+          </a:p>
+          <a:p>
+            <a:pPr>
+              <a:spcAft>
+                <a:spcPts val="600"/>
+              </a:spcAft>
+            </a:pPr>
+            <a:r>
+              <a:rPr sz="1500">
+                <a:solidFill>
+                  <a:srgbClr val="22282E"/>
+                </a:solidFill>
+              </a:rPr>
+              <a:t>•  Compara strace y ltrace: qué observa cada uno, cuándo uno no ve nada y para qué sirve cada uno en el análisis de malware.</a:t>
+            </a:r>
+          </a:p>
+          <a:p>
+            <a:pPr>
+              <a:spcAft>
+                <a:spcPts val="600"/>
+              </a:spcAft>
+            </a:pPr>
+            <a:r>
+              <a:rPr sz="1500">
+                <a:solidFill>
+                  <a:srgbClr val="22282E"/>
+                </a:solidFill>
+              </a:rPr>
+              <a:t>•  Explica por qué la separación usuario/kernel es una frontera de seguridad y qué significa una "elevación a kernel".</a:t>
+            </a:r>
+          </a:p>
+          <a:p>
+            <a:pPr>
+              <a:spcAft>
+                <a:spcPts val="600"/>
+              </a:spcAft>
+            </a:pPr>
+            <a:r>
+              <a:rPr sz="1500">
+                <a:solidFill>
+                  <a:srgbClr val="22282E"/>
+                </a:solidFill>
+              </a:rPr>
+              <a:t>•  Interpreta un /proc/&lt;pid&gt;/maps real: localiza las regiones ejecutables, las de solo lectura y el stack, y explica cómo ASLR afecta a esas direcciones.</a:t>
             </a:r>
           </a:p>
         </p:txBody>
@@ -3347,7 +3382,7 @@
                   <a:srgbClr val="0B3D2E"/>
                 </a:solidFill>
               </a:rPr>
-              <a:t>❓ Preguntas frecuentes</a:t>
+              <a:t>📝 Reto verificable</a:t>
             </a:r>
           </a:p>
         </p:txBody>
@@ -3385,52 +3420,22 @@
                   <a:srgbClr val="22282E"/>
                 </a:solidFill>
               </a:rPr>
-              <a:t>•  ❓ ¿Por qué un pentester necesita entender syscalls? Porque la explotación de memoria, la inyección de shellcode y la evasión operan justo en esta capa. Y en defensa, EDRs y sandboxes se basan en observar syscalls.</a:t>
-            </a:r>
-          </a:p>
-          <a:p>
-            <a:pPr>
-              <a:spcAft>
-                <a:spcPts val="600"/>
-              </a:spcAft>
-            </a:pPr>
-            <a:r>
-              <a:rPr sz="1500">
-                <a:solidFill>
-                  <a:srgbClr val="22282E"/>
-                </a:solidFill>
-              </a:rPr>
-              <a:t>•  ❓ ¿Qué relación hay con los buffer overflows? Un overflow corrompe estructuras en el stack o heap para desviar el flujo de ejecución. Sin entender el layout de memoria, esos ataques (y sus mitigaciones: ASLR, DEP, canarios) no tienen sentido.</a:t>
-            </a:r>
-          </a:p>
-          <a:p>
-            <a:pPr>
-              <a:spcAft>
-                <a:spcPts val="600"/>
-              </a:spcAft>
-            </a:pPr>
-            <a:r>
-              <a:rPr sz="1500">
-                <a:solidFill>
-                  <a:srgbClr val="22282E"/>
-                </a:solidFill>
-              </a:rPr>
-              <a:t>•  ❓ ¿strace sirve para analizar malware? Sí, es una herramienta clave de análisis dinámico: revela qué archivos toca, con qué se conecta y qué procesos lanza, siempre en un entorno aislado.</a:t>
-            </a:r>
-          </a:p>
-          <a:p>
-            <a:pPr>
-              <a:spcAft>
-                <a:spcPts val="600"/>
-              </a:spcAft>
-            </a:pPr>
-            <a:r>
-              <a:rPr sz="1500">
-                <a:solidFill>
-                  <a:srgbClr val="22282E"/>
-                </a:solidFill>
-              </a:rPr>
-              <a:t>•  ❓ ¿Windows tiene equivalentes? Sí: Process Monitor, ETW y API monitors cumplen un papel análogo observando llamadas y actividad del sistema.</a:t>
+              <a:t>•  Analiza un binario desconocido pero inofensivo, provisto en tu laboratorio, usando solo herramientas de observación del sistema operativo. Describe su comportamiento a partir de sus syscalls (qué…</a:t>
+            </a:r>
+          </a:p>
+          <a:p>
+            <a:pPr>
+              <a:spcAft>
+                <a:spcPts val="600"/>
+              </a:spcAft>
+            </a:pPr>
+            <a:r>
+              <a:rPr sz="1500">
+                <a:solidFill>
+                  <a:srgbClr val="22282E"/>
+                </a:solidFill>
+              </a:rPr>
+              <a:t>•  Criterio de aceptación: el informe lista las syscalls relevantes observadas con strace (E/S de archivos, actividad de red, execve) y deduce a partir de ellas qué hace el programa, distinguiendo con…</a:t>
             </a:r>
           </a:p>
         </p:txBody>
@@ -3481,7 +3486,7 @@
                   <a:srgbClr val="0B3D2E"/>
                 </a:solidFill>
               </a:rPr>
-              <a:t>🔗 Referencias</a:t>
+              <a:t>⚠️ Errores comunes</a:t>
             </a:r>
           </a:p>
         </p:txBody>
@@ -3519,6 +3524,304 @@
                   <a:srgbClr val="22282E"/>
                 </a:solidFill>
               </a:rPr>
+              <a:t>•  strace: Operation not permitted — Restricción de ptracescope o proceso ajeno. Traza procesos propios o ajusta la política en tu lab.</a:t>
+            </a:r>
+          </a:p>
+          <a:p>
+            <a:pPr>
+              <a:spcAft>
+                <a:spcPts val="600"/>
+              </a:spcAft>
+            </a:pPr>
+            <a:r>
+              <a:rPr sz="1500">
+                <a:solidFill>
+                  <a:srgbClr val="22282E"/>
+                </a:solidFill>
+              </a:rPr>
+              <a:t>•  ltrace no muestra nada — Binario estático o sin símbolos. ltrace necesita enlace dinámico para interceptar librería.</a:t>
+            </a:r>
+          </a:p>
+          <a:p>
+            <a:pPr>
+              <a:spcAft>
+                <a:spcPts val="600"/>
+              </a:spcAft>
+            </a:pPr>
+            <a:r>
+              <a:rPr sz="1500">
+                <a:solidFill>
+                  <a:srgbClr val="22282E"/>
+                </a:solidFill>
+              </a:rPr>
+              <a:t>•  /proc/&lt;pid&gt;/maps vacío o denegado — Permisos insuficientes o el proceso ya terminó. Usa un PID vivo y propio.</a:t>
+            </a:r>
+          </a:p>
+          <a:p>
+            <a:pPr>
+              <a:spcAft>
+                <a:spcPts val="600"/>
+              </a:spcAft>
+            </a:pPr>
+            <a:r>
+              <a:rPr sz="1500">
+                <a:solidFill>
+                  <a:srgbClr val="22282E"/>
+                </a:solidFill>
+              </a:rPr>
+              <a:t>•  Confundir stack con heap — Stack = automático y LIFO (locales); heap = dinámico (malloc). Revisa el layout de memoria.</a:t>
+            </a:r>
+          </a:p>
+          <a:p>
+            <a:pPr>
+              <a:spcAft>
+                <a:spcPts val="600"/>
+              </a:spcAft>
+            </a:pPr>
+            <a:r>
+              <a:rPr sz="1500">
+                <a:solidFill>
+                  <a:srgbClr val="22282E"/>
+                </a:solidFill>
+              </a:rPr>
+              <a:t>•  strace ralentiza mucho el programa — Es esperable: intercepta cada syscall. Filtra con -e trace= para reducir el ruido y el impacto.</a:t>
+            </a:r>
+          </a:p>
+          <a:p>
+            <a:pPr>
+              <a:spcAft>
+                <a:spcPts val="600"/>
+              </a:spcAft>
+            </a:pPr>
+            <a:r>
+              <a:rPr sz="1500">
+                <a:solidFill>
+                  <a:srgbClr val="22282E"/>
+                </a:solidFill>
+              </a:rPr>
+              <a:t>•  No ver syscalls de red esperadas — El programa usa una librería que multiplexa o cachea. Combina strace con ltrace y revisa -f para hijos.</a:t>
+            </a:r>
+          </a:p>
+        </p:txBody>
+      </p:sp>
+    </p:spTree>
+  </p:cSld>
+  <p:clrMapOvr>
+    <a:masterClrMapping/>
+  </p:clrMapOvr>
+</p:sld>
+</file>
+
+<file path=ppt/slides/slide13.xml><?xml version="1.0" encoding="utf-8"?>
+<p:sld xmlns:a="http://schemas.openxmlformats.org/drawingml/2006/main" xmlns:p="http://schemas.openxmlformats.org/presentationml/2006/main" xmlns:r="http://schemas.openxmlformats.org/officeDocument/2006/relationships">
+  <p:cSld>
+    <p:spTree>
+      <p:nvGrpSpPr>
+        <p:cNvPr id="1" name=""/>
+        <p:cNvGrpSpPr/>
+        <p:nvPr/>
+      </p:nvGrpSpPr>
+      <p:grpSpPr/>
+      <p:sp>
+        <p:nvSpPr>
+          <p:cNvPr id="2" name="TextBox 1"/>
+          <p:cNvSpPr txBox="1"/>
+          <p:nvPr/>
+        </p:nvSpPr>
+        <p:spPr>
+          <a:xfrm>
+            <a:off x="457200" y="320040"/>
+            <a:ext cx="8229600" cy="822960"/>
+          </a:xfrm>
+          <a:prstGeom prst="rect">
+            <a:avLst/>
+          </a:prstGeom>
+          <a:noFill/>
+        </p:spPr>
+        <p:txBody>
+          <a:bodyPr wrap="square">
+            <a:spAutoFit/>
+          </a:bodyPr>
+          <a:lstStyle/>
+          <a:p>
+            <a:r>
+              <a:rPr sz="2600" b="1">
+                <a:solidFill>
+                  <a:srgbClr val="0B3D2E"/>
+                </a:solidFill>
+              </a:rPr>
+              <a:t>❓ Preguntas frecuentes</a:t>
+            </a:r>
+          </a:p>
+        </p:txBody>
+      </p:sp>
+      <p:sp>
+        <p:nvSpPr>
+          <p:cNvPr id="3" name="TextBox 2"/>
+          <p:cNvSpPr txBox="1"/>
+          <p:nvPr/>
+        </p:nvSpPr>
+        <p:spPr>
+          <a:xfrm>
+            <a:off x="457200" y="1280160"/>
+            <a:ext cx="8229600" cy="4937760"/>
+          </a:xfrm>
+          <a:prstGeom prst="rect">
+            <a:avLst/>
+          </a:prstGeom>
+          <a:noFill/>
+        </p:spPr>
+        <p:txBody>
+          <a:bodyPr wrap="square">
+            <a:spAutoFit/>
+          </a:bodyPr>
+          <a:lstStyle/>
+          <a:p>
+            <a:pPr>
+              <a:spcAft>
+                <a:spcPts val="600"/>
+              </a:spcAft>
+            </a:pPr>
+            <a:r>
+              <a:rPr sz="1500">
+                <a:solidFill>
+                  <a:srgbClr val="22282E"/>
+                </a:solidFill>
+              </a:rPr>
+              <a:t>•  ❓ ¿Por qué un pentester necesita entender syscalls? Porque la explotación de memoria, la inyección de shellcode y la evasión operan justo en esta capa. Y en el lado defensivo, los EDR y los sandboxes…</a:t>
+            </a:r>
+          </a:p>
+          <a:p>
+            <a:pPr>
+              <a:spcAft>
+                <a:spcPts val="600"/>
+              </a:spcAft>
+            </a:pPr>
+            <a:r>
+              <a:rPr sz="1500">
+                <a:solidFill>
+                  <a:srgbClr val="22282E"/>
+                </a:solidFill>
+              </a:rPr>
+              <a:t>•  ❓ ¿Qué relación hay con los buffer overflows? Un overflow corrompe estructuras en el stack o el heap para desviar el flujo de ejecución. Sin comprender el layout de memoria, ni el ataque ni sus…</a:t>
+            </a:r>
+          </a:p>
+          <a:p>
+            <a:pPr>
+              <a:spcAft>
+                <a:spcPts val="600"/>
+              </a:spcAft>
+            </a:pPr>
+            <a:r>
+              <a:rPr sz="1500">
+                <a:solidFill>
+                  <a:srgbClr val="22282E"/>
+                </a:solidFill>
+              </a:rPr>
+              <a:t>•  ❓ ¿strace sirve para analizar malware? Sí, es una herramienta clave del análisis dinámico: revela qué archivos toca un binario, con qué servidores se conecta y qué procesos lanza. Debe usarse siempre…</a:t>
+            </a:r>
+          </a:p>
+          <a:p>
+            <a:pPr>
+              <a:spcAft>
+                <a:spcPts val="600"/>
+              </a:spcAft>
+            </a:pPr>
+            <a:r>
+              <a:rPr sz="1500">
+                <a:solidFill>
+                  <a:srgbClr val="22282E"/>
+                </a:solidFill>
+              </a:rPr>
+              <a:t>•  ❓ ¿Windows tiene equivalentes? Sí. Process Monitor (Sysinternals), ETW (Event Tracing for Windows) y los monitores de API cumplen un papel análogo, observando llamadas y actividad del sistema. Los…</a:t>
+            </a:r>
+          </a:p>
+        </p:txBody>
+      </p:sp>
+    </p:spTree>
+  </p:cSld>
+  <p:clrMapOvr>
+    <a:masterClrMapping/>
+  </p:clrMapOvr>
+</p:sld>
+</file>
+
+<file path=ppt/slides/slide14.xml><?xml version="1.0" encoding="utf-8"?>
+<p:sld xmlns:a="http://schemas.openxmlformats.org/drawingml/2006/main" xmlns:p="http://schemas.openxmlformats.org/presentationml/2006/main" xmlns:r="http://schemas.openxmlformats.org/officeDocument/2006/relationships">
+  <p:cSld>
+    <p:spTree>
+      <p:nvGrpSpPr>
+        <p:cNvPr id="1" name=""/>
+        <p:cNvGrpSpPr/>
+        <p:nvPr/>
+      </p:nvGrpSpPr>
+      <p:grpSpPr/>
+      <p:sp>
+        <p:nvSpPr>
+          <p:cNvPr id="2" name="TextBox 1"/>
+          <p:cNvSpPr txBox="1"/>
+          <p:nvPr/>
+        </p:nvSpPr>
+        <p:spPr>
+          <a:xfrm>
+            <a:off x="457200" y="320040"/>
+            <a:ext cx="8229600" cy="822960"/>
+          </a:xfrm>
+          <a:prstGeom prst="rect">
+            <a:avLst/>
+          </a:prstGeom>
+          <a:noFill/>
+        </p:spPr>
+        <p:txBody>
+          <a:bodyPr wrap="square">
+            <a:spAutoFit/>
+          </a:bodyPr>
+          <a:lstStyle/>
+          <a:p>
+            <a:r>
+              <a:rPr sz="2600" b="1">
+                <a:solidFill>
+                  <a:srgbClr val="0B3D2E"/>
+                </a:solidFill>
+              </a:rPr>
+              <a:t>🔗 Referencias</a:t>
+            </a:r>
+          </a:p>
+        </p:txBody>
+      </p:sp>
+      <p:sp>
+        <p:nvSpPr>
+          <p:cNvPr id="3" name="TextBox 2"/>
+          <p:cNvSpPr txBox="1"/>
+          <p:nvPr/>
+        </p:nvSpPr>
+        <p:spPr>
+          <a:xfrm>
+            <a:off x="457200" y="1280160"/>
+            <a:ext cx="8229600" cy="4937760"/>
+          </a:xfrm>
+          <a:prstGeom prst="rect">
+            <a:avLst/>
+          </a:prstGeom>
+          <a:noFill/>
+        </p:spPr>
+        <p:txBody>
+          <a:bodyPr wrap="square">
+            <a:spAutoFit/>
+          </a:bodyPr>
+          <a:lstStyle/>
+          <a:p>
+            <a:pPr>
+              <a:spcAft>
+                <a:spcPts val="600"/>
+              </a:spcAft>
+            </a:pPr>
+            <a:r>
+              <a:rPr sz="1500">
+                <a:solidFill>
+                  <a:srgbClr val="22282E"/>
+                </a:solidFill>
+              </a:rPr>
               <a:t>•  Tanenbaum &amp; Bos, Modern Operating Systems.</a:t>
             </a:r>
           </a:p>
@@ -3534,6 +3837,21 @@
                   <a:srgbClr val="22282E"/>
                 </a:solidFill>
               </a:rPr>
+              <a:t>•  Michael Kerrisk, The Linux Programming Interface.</a:t>
+            </a:r>
+          </a:p>
+          <a:p>
+            <a:pPr>
+              <a:spcAft>
+                <a:spcPts val="600"/>
+              </a:spcAft>
+            </a:pPr>
+            <a:r>
+              <a:rPr sz="1500">
+                <a:solidFill>
+                  <a:srgbClr val="22282E"/>
+                </a:solidFill>
+              </a:rPr>
               <a:t>•  man 1 strace, man 5 proc</a:t>
             </a:r>
           </a:p>
@@ -3564,11 +3882,236 @@
                   <a:srgbClr val="22282E"/>
                 </a:solidFill>
               </a:rPr>
-              <a:t>•  Michael Kerrisk, The Linux Programming Interface.</a:t>
-            </a:r>
-          </a:p>
-        </p:txBody>
-      </p:sp>
+              <a:t>•  MITRE ATT&amp;CK — Process Injection (T1055) — &lt;https://attack.mitre.org/techniques/T1055/&gt;</a:t>
+            </a:r>
+          </a:p>
+        </p:txBody>
+      </p:sp>
+    </p:spTree>
+  </p:cSld>
+  <p:clrMapOvr>
+    <a:masterClrMapping/>
+  </p:clrMapOvr>
+</p:sld>
+</file>
+
+<file path=ppt/slides/slide15.xml><?xml version="1.0" encoding="utf-8"?>
+<p:sld xmlns:a="http://schemas.openxmlformats.org/drawingml/2006/main" xmlns:p="http://schemas.openxmlformats.org/presentationml/2006/main" xmlns:r="http://schemas.openxmlformats.org/officeDocument/2006/relationships">
+  <p:cSld>
+    <p:spTree>
+      <p:nvGrpSpPr>
+        <p:cNvPr id="1" name=""/>
+        <p:cNvGrpSpPr/>
+        <p:nvPr/>
+      </p:nvGrpSpPr>
+      <p:grpSpPr/>
+      <p:sp>
+        <p:nvSpPr>
+          <p:cNvPr id="2" name="TextBox 1"/>
+          <p:cNvSpPr txBox="1"/>
+          <p:nvPr/>
+        </p:nvSpPr>
+        <p:spPr>
+          <a:xfrm>
+            <a:off x="457200" y="274320"/>
+            <a:ext cx="8229600" cy="640080"/>
+          </a:xfrm>
+          <a:prstGeom prst="rect">
+            <a:avLst/>
+          </a:prstGeom>
+          <a:noFill/>
+        </p:spPr>
+        <p:txBody>
+          <a:bodyPr wrap="square">
+            <a:spAutoFit/>
+          </a:bodyPr>
+          <a:lstStyle/>
+          <a:p>
+            <a:r>
+              <a:rPr sz="2200" b="1">
+                <a:solidFill>
+                  <a:srgbClr val="0B3D2E"/>
+                </a:solidFill>
+              </a:rPr>
+              <a:t>Diagrama 1</a:t>
+            </a:r>
+          </a:p>
+        </p:txBody>
+      </p:sp>
+      <p:pic>
+        <p:nvPicPr>
+          <p:cNvPr id="3" name="Picture 2" descr="2e0638e963f1136f.png"/>
+          <p:cNvPicPr>
+            <a:picLocks noChangeAspect="1"/>
+          </p:cNvPicPr>
+          <p:nvPr/>
+        </p:nvPicPr>
+        <p:blipFill>
+          <a:blip r:embed="rId2"/>
+          <a:stretch>
+            <a:fillRect/>
+          </a:stretch>
+        </p:blipFill>
+        <p:spPr>
+          <a:xfrm>
+            <a:off x="2230423" y="1097280"/>
+            <a:ext cx="4683154" cy="5303520"/>
+          </a:xfrm>
+          <a:prstGeom prst="rect">
+            <a:avLst/>
+          </a:prstGeom>
+        </p:spPr>
+      </p:pic>
+    </p:spTree>
+  </p:cSld>
+  <p:clrMapOvr>
+    <a:masterClrMapping/>
+  </p:clrMapOvr>
+</p:sld>
+</file>
+
+<file path=ppt/slides/slide16.xml><?xml version="1.0" encoding="utf-8"?>
+<p:sld xmlns:a="http://schemas.openxmlformats.org/drawingml/2006/main" xmlns:p="http://schemas.openxmlformats.org/presentationml/2006/main" xmlns:r="http://schemas.openxmlformats.org/officeDocument/2006/relationships">
+  <p:cSld>
+    <p:spTree>
+      <p:nvGrpSpPr>
+        <p:cNvPr id="1" name=""/>
+        <p:cNvGrpSpPr/>
+        <p:nvPr/>
+      </p:nvGrpSpPr>
+      <p:grpSpPr/>
+      <p:sp>
+        <p:nvSpPr>
+          <p:cNvPr id="2" name="TextBox 1"/>
+          <p:cNvSpPr txBox="1"/>
+          <p:nvPr/>
+        </p:nvSpPr>
+        <p:spPr>
+          <a:xfrm>
+            <a:off x="457200" y="274320"/>
+            <a:ext cx="8229600" cy="640080"/>
+          </a:xfrm>
+          <a:prstGeom prst="rect">
+            <a:avLst/>
+          </a:prstGeom>
+          <a:noFill/>
+        </p:spPr>
+        <p:txBody>
+          <a:bodyPr wrap="square">
+            <a:spAutoFit/>
+          </a:bodyPr>
+          <a:lstStyle/>
+          <a:p>
+            <a:r>
+              <a:rPr sz="2200" b="1">
+                <a:solidFill>
+                  <a:srgbClr val="0B3D2E"/>
+                </a:solidFill>
+              </a:rPr>
+              <a:t>Diagrama 2</a:t>
+            </a:r>
+          </a:p>
+        </p:txBody>
+      </p:sp>
+      <p:pic>
+        <p:nvPicPr>
+          <p:cNvPr id="3" name="Picture 2" descr="d168f8526a5ad1be.png"/>
+          <p:cNvPicPr>
+            <a:picLocks noChangeAspect="1"/>
+          </p:cNvPicPr>
+          <p:nvPr/>
+        </p:nvPicPr>
+        <p:blipFill>
+          <a:blip r:embed="rId2"/>
+          <a:stretch>
+            <a:fillRect/>
+          </a:stretch>
+        </p:blipFill>
+        <p:spPr>
+          <a:xfrm>
+            <a:off x="3949648" y="1097280"/>
+            <a:ext cx="1244703" cy="5303519"/>
+          </a:xfrm>
+          <a:prstGeom prst="rect">
+            <a:avLst/>
+          </a:prstGeom>
+        </p:spPr>
+      </p:pic>
+    </p:spTree>
+  </p:cSld>
+  <p:clrMapOvr>
+    <a:masterClrMapping/>
+  </p:clrMapOvr>
+</p:sld>
+</file>
+
+<file path=ppt/slides/slide17.xml><?xml version="1.0" encoding="utf-8"?>
+<p:sld xmlns:a="http://schemas.openxmlformats.org/drawingml/2006/main" xmlns:p="http://schemas.openxmlformats.org/presentationml/2006/main" xmlns:r="http://schemas.openxmlformats.org/officeDocument/2006/relationships">
+  <p:cSld>
+    <p:spTree>
+      <p:nvGrpSpPr>
+        <p:cNvPr id="1" name=""/>
+        <p:cNvGrpSpPr/>
+        <p:nvPr/>
+      </p:nvGrpSpPr>
+      <p:grpSpPr/>
+      <p:sp>
+        <p:nvSpPr>
+          <p:cNvPr id="2" name="TextBox 1"/>
+          <p:cNvSpPr txBox="1"/>
+          <p:nvPr/>
+        </p:nvSpPr>
+        <p:spPr>
+          <a:xfrm>
+            <a:off x="457200" y="274320"/>
+            <a:ext cx="8229600" cy="640080"/>
+          </a:xfrm>
+          <a:prstGeom prst="rect">
+            <a:avLst/>
+          </a:prstGeom>
+          <a:noFill/>
+        </p:spPr>
+        <p:txBody>
+          <a:bodyPr wrap="square">
+            <a:spAutoFit/>
+          </a:bodyPr>
+          <a:lstStyle/>
+          <a:p>
+            <a:r>
+              <a:rPr sz="2200" b="1">
+                <a:solidFill>
+                  <a:srgbClr val="0B3D2E"/>
+                </a:solidFill>
+              </a:rPr>
+              <a:t>Diagrama 3</a:t>
+            </a:r>
+          </a:p>
+        </p:txBody>
+      </p:sp>
+      <p:pic>
+        <p:nvPicPr>
+          <p:cNvPr id="3" name="Picture 2" descr="ae02a37e1711a294.png"/>
+          <p:cNvPicPr>
+            <a:picLocks noChangeAspect="1"/>
+          </p:cNvPicPr>
+          <p:nvPr/>
+        </p:nvPicPr>
+        <p:blipFill>
+          <a:blip r:embed="rId2"/>
+          <a:stretch>
+            <a:fillRect/>
+          </a:stretch>
+        </p:blipFill>
+        <p:spPr>
+          <a:xfrm>
+            <a:off x="457200" y="1536612"/>
+            <a:ext cx="8229600" cy="4424855"/>
+          </a:xfrm>
+          <a:prstGeom prst="rect">
+            <a:avLst/>
+          </a:prstGeom>
+        </p:spPr>
+      </p:pic>
     </p:spTree>
   </p:cSld>
   <p:clrMapOvr>
@@ -3653,7 +4196,7 @@
                   <a:srgbClr val="22282E"/>
                 </a:solidFill>
               </a:rPr>
-              <a:t>•  Comprender cómo un sistema operativo gestiona procesos, memoria y la frontera entre modo usuario y modo kernel a través de las llamadas al sistema. Este es el sustrato sobre el que ocurren la explotación de memoria, la inyección de código y la evasión, y es imprescindible para las partes de explotación y forense.</a:t>
+              <a:t>•  Comprender cómo un sistema operativo gestiona los procesos, organiza su memoria y traza la frontera entre el modo usuario y el modo kernel a través de las llamadas al sistema. Este es el sustrato…</a:t>
             </a:r>
           </a:p>
         </p:txBody>
@@ -3757,67 +4300,82 @@
                   <a:srgbClr val="22282E"/>
                 </a:solidFill>
               </a:rPr>
-              <a:t>•  Explicar el ciclo de vida y estados de un proceso.</a:t>
-            </a:r>
-          </a:p>
-          <a:p>
-            <a:pPr>
-              <a:spcAft>
-                <a:spcPts val="600"/>
-              </a:spcAft>
-            </a:pPr>
-            <a:r>
-              <a:rPr sz="1500">
-                <a:solidFill>
-                  <a:srgbClr val="22282E"/>
-                </a:solidFill>
-              </a:rPr>
-              <a:t>•  Describir el layout de memoria de un proceso (stack, heap, code, data).</a:t>
-            </a:r>
-          </a:p>
-          <a:p>
-            <a:pPr>
-              <a:spcAft>
-                <a:spcPts val="600"/>
-              </a:spcAft>
-            </a:pPr>
-            <a:r>
-              <a:rPr sz="1500">
-                <a:solidFill>
-                  <a:srgbClr val="22282E"/>
-                </a:solidFill>
-              </a:rPr>
-              <a:t>•  Diferenciar modo usuario de modo kernel y el papel de las syscalls.</a:t>
-            </a:r>
-          </a:p>
-          <a:p>
-            <a:pPr>
-              <a:spcAft>
-                <a:spcPts val="600"/>
-              </a:spcAft>
-            </a:pPr>
-            <a:r>
-              <a:rPr sz="1500">
-                <a:solidFill>
-                  <a:srgbClr val="22282E"/>
-                </a:solidFill>
-              </a:rPr>
-              <a:t>•  Rastrear las llamadas al sistema de un programa.</a:t>
-            </a:r>
-          </a:p>
-          <a:p>
-            <a:pPr>
-              <a:spcAft>
-                <a:spcPts val="600"/>
-              </a:spcAft>
-            </a:pPr>
-            <a:r>
-              <a:rPr sz="1500">
-                <a:solidFill>
-                  <a:srgbClr val="22282E"/>
-                </a:solidFill>
-              </a:rPr>
-              <a:t>•  Relacionar estos mecanismos con técnicas de ataque y detección.</a:t>
+              <a:t>•  Explicar el ciclo de vida de un proceso, sus estados y cómo el planificador reparte la CPU.</a:t>
+            </a:r>
+          </a:p>
+          <a:p>
+            <a:pPr>
+              <a:spcAft>
+                <a:spcPts val="600"/>
+              </a:spcAft>
+            </a:pPr>
+            <a:r>
+              <a:rPr sz="1500">
+                <a:solidFill>
+                  <a:srgbClr val="22282E"/>
+                </a:solidFill>
+              </a:rPr>
+              <a:t>•  Describir el layout de memoria de un proceso (code, data, heap, stack) y qué vive en cada región.</a:t>
+            </a:r>
+          </a:p>
+          <a:p>
+            <a:pPr>
+              <a:spcAft>
+                <a:spcPts val="600"/>
+              </a:spcAft>
+            </a:pPr>
+            <a:r>
+              <a:rPr sz="1500">
+                <a:solidFill>
+                  <a:srgbClr val="22282E"/>
+                </a:solidFill>
+              </a:rPr>
+              <a:t>•  Diferenciar el modo usuario del modo kernel y el papel de las syscalls como única puerta legítima al kernel.</a:t>
+            </a:r>
+          </a:p>
+          <a:p>
+            <a:pPr>
+              <a:spcAft>
+                <a:spcPts val="600"/>
+              </a:spcAft>
+            </a:pPr>
+            <a:r>
+              <a:rPr sz="1500">
+                <a:solidFill>
+                  <a:srgbClr val="22282E"/>
+                </a:solidFill>
+              </a:rPr>
+              <a:t>•  Rastrear las llamadas al sistema de un programa con strace y las de librería con ltrace.</a:t>
+            </a:r>
+          </a:p>
+          <a:p>
+            <a:pPr>
+              <a:spcAft>
+                <a:spcPts val="600"/>
+              </a:spcAft>
+            </a:pPr>
+            <a:r>
+              <a:rPr sz="1500">
+                <a:solidFill>
+                  <a:srgbClr val="22282E"/>
+                </a:solidFill>
+              </a:rPr>
+              <a:t>•  Relacionar estos mecanismos con técnicas de ataque (buffer overflow, hooking) y de detección (EDR, sandbox).</a:t>
+            </a:r>
+          </a:p>
+          <a:p>
+            <a:pPr>
+              <a:spcAft>
+                <a:spcPts val="600"/>
+              </a:spcAft>
+            </a:pPr>
+            <a:r>
+              <a:rPr sz="1500">
+                <a:solidFill>
+                  <a:srgbClr val="22282E"/>
+                </a:solidFill>
+              </a:rPr>
+              <a:t>•  Interpretar el mapa de memoria de un proceso vivo a través de /proc.</a:t>
             </a:r>
           </a:p>
         </p:txBody>
@@ -4047,7 +4605,7 @@
                   <a:srgbClr val="0B3D2E"/>
                 </a:solidFill>
               </a:rPr>
-              <a:t>📖 Definiciones y características</a:t>
+              <a:t>🧠 Explicación en profundidad</a:t>
             </a:r>
           </a:p>
         </p:txBody>
@@ -4085,82 +4643,97 @@
                   <a:srgbClr val="22282E"/>
                 </a:solidFill>
               </a:rPr>
-              <a:t>•  Proceso: programa en ejecución con su propio espacio de memoria. Clave: aislado de otros por memoria virtual.</a:t>
-            </a:r>
-          </a:p>
-          <a:p>
-            <a:pPr>
-              <a:spcAft>
-                <a:spcPts val="600"/>
-              </a:spcAft>
-            </a:pPr>
-            <a:r>
-              <a:rPr sz="1500">
-                <a:solidFill>
-                  <a:srgbClr val="22282E"/>
-                </a:solidFill>
-              </a:rPr>
-              <a:t>•  Hilo (thread): flujo de ejecución dentro de un proceso; comparten memoria. Clave: concurrencia con estado compartido.</a:t>
-            </a:r>
-          </a:p>
-          <a:p>
-            <a:pPr>
-              <a:spcAft>
-                <a:spcPts val="600"/>
-              </a:spcAft>
-            </a:pPr>
-            <a:r>
-              <a:rPr sz="1500">
-                <a:solidFill>
-                  <a:srgbClr val="22282E"/>
-                </a:solidFill>
-              </a:rPr>
-              <a:t>•  Stack: memoria LIFO para llamadas y variables locales. Clave: objetivo de desbordamientos (buffer overflow).</a:t>
-            </a:r>
-          </a:p>
-          <a:p>
-            <a:pPr>
-              <a:spcAft>
-                <a:spcPts val="600"/>
-              </a:spcAft>
-            </a:pPr>
-            <a:r>
-              <a:rPr sz="1500">
-                <a:solidFill>
-                  <a:srgbClr val="22282E"/>
-                </a:solidFill>
-              </a:rPr>
-              <a:t>•  Heap: memoria dinámica gestionada por el programa. Clave: objetivo de vulnerabilidades tipo use-after-free.</a:t>
-            </a:r>
-          </a:p>
-          <a:p>
-            <a:pPr>
-              <a:spcAft>
-                <a:spcPts val="600"/>
-              </a:spcAft>
-            </a:pPr>
-            <a:r>
-              <a:rPr sz="1500">
-                <a:solidFill>
-                  <a:srgbClr val="22282E"/>
-                </a:solidFill>
-              </a:rPr>
-              <a:t>•  Syscall: interfaz para pedir servicios al kernel (open, read, execve). Clave: única vía legítima de un proceso para tocar el hardware/recursos.</a:t>
-            </a:r>
-          </a:p>
-          <a:p>
-            <a:pPr>
-              <a:spcAft>
-                <a:spcPts val="600"/>
-              </a:spcAft>
-            </a:pPr>
-            <a:r>
-              <a:rPr sz="1500">
-                <a:solidFill>
-                  <a:srgbClr val="22282E"/>
-                </a:solidFill>
-              </a:rPr>
-              <a:t>•  Modo usuario/kernel: niveles de privilegio de la CPU (rings). Clave: la separación evita que un proceso comprometa el sistema directamente.</a:t>
+              <a:t>•  Un proceso es un programa en ejecución: no el archivo en disco, sino la instancia viva con su propio espacio de memoria, sus descriptores de archivo abiertos, su identificador (PID) y su contexto de…</a:t>
+            </a:r>
+          </a:p>
+          <a:p>
+            <a:pPr>
+              <a:spcAft>
+                <a:spcPts val="600"/>
+              </a:spcAft>
+            </a:pPr>
+            <a:r>
+              <a:rPr sz="1500">
+                <a:solidFill>
+                  <a:srgbClr val="22282E"/>
+                </a:solidFill>
+              </a:rPr>
+              <a:t>•  Una CPU solo ejecuta un hilo por núcleo en cada instante, pero un sistema típico tiene cientos de procesos. El planificador (scheduler) del kernel crea la ilusión de simultaneidad alternando…</a:t>
+            </a:r>
+          </a:p>
+          <a:p>
+            <a:pPr>
+              <a:spcAft>
+                <a:spcPts val="600"/>
+              </a:spcAft>
+            </a:pPr>
+            <a:r>
+              <a:rPr sz="1500">
+                <a:solidFill>
+                  <a:srgbClr val="22282E"/>
+                </a:solidFill>
+              </a:rPr>
+              <a:t>•  El espacio de direcciones virtual de un proceso está organizado en regiones bien definidas, y conocerlas es imprescindible para entender la explotación de memoria. En las direcciones más bajas está…</a:t>
+            </a:r>
+          </a:p>
+          <a:p>
+            <a:pPr>
+              <a:spcAft>
+                <a:spcPts val="600"/>
+              </a:spcAft>
+            </a:pPr>
+            <a:r>
+              <a:rPr sz="1500">
+                <a:solidFill>
+                  <a:srgbClr val="22282E"/>
+                </a:solidFill>
+              </a:rPr>
+              <a:t>•  Lee el diagrama de abajo arriba y verás por qué el orden no es arbitrario: lo que</a:t>
+            </a:r>
+          </a:p>
+          <a:p>
+            <a:pPr>
+              <a:spcAft>
+                <a:spcPts val="600"/>
+              </a:spcAft>
+            </a:pPr>
+            <a:r>
+              <a:rPr sz="1500">
+                <a:solidFill>
+                  <a:srgbClr val="22282E"/>
+                </a:solidFill>
+              </a:rPr>
+              <a:t>•  tiene tamaño fijo y se conoce al compilar (text, data, BSS) ocupa la parte baja,</a:t>
+            </a:r>
+          </a:p>
+          <a:p>
+            <a:pPr>
+              <a:spcAft>
+                <a:spcPts val="600"/>
+              </a:spcAft>
+            </a:pPr>
+            <a:r>
+              <a:rPr sz="1500">
+                <a:solidFill>
+                  <a:srgbClr val="22282E"/>
+                </a:solidFill>
+              </a:rPr>
+              <a:t>•  y las dos regiones que crecen en tiempo de ejecución —heap y stack— quedan enfrentadas</a:t>
+            </a:r>
+          </a:p>
+          <a:p>
+            <a:pPr>
+              <a:spcAft>
+                <a:spcPts val="600"/>
+              </a:spcAft>
+            </a:pPr>
+            <a:r>
+              <a:rPr sz="1500">
+                <a:solidFill>
+                  <a:srgbClr val="22282E"/>
+                </a:solidFill>
+              </a:rPr>
+              <a:t>•  en los extremos del espacio libre que hay en medio. Ese mapa no es teórico: puedes ver</a:t>
             </a:r>
           </a:p>
         </p:txBody>
@@ -4211,7 +4784,7 @@
                   <a:srgbClr val="0B3D2E"/>
                 </a:solidFill>
               </a:rPr>
-              <a:t>🧰 Herramientas y preparación</a:t>
+              <a:t>📖 Definiciones y características</a:t>
             </a:r>
           </a:p>
         </p:txBody>
@@ -4249,7 +4822,97 @@
                   <a:srgbClr val="22282E"/>
                 </a:solidFill>
               </a:rPr>
-              <a:t>•  En Linux/Kali: ps, top/htop, /proc, strace, ltrace, pmap, cat /proc/&lt;pid&gt;/maps. Necesitas permisos para trazar procesos propios. Un programa C mínimo o cualquier binario servirá de sujeto de estudio. Trabaja en tu VM de laboratorio.</a:t>
+              <a:t>•  Proceso: programa en ejecución con su propio espacio de memoria virtual, PID y recursos. Está aislado de otros procesos por la memoria virtual, lo que lo convierte en la unidad básica de contención…</a:t>
+            </a:r>
+          </a:p>
+          <a:p>
+            <a:pPr>
+              <a:spcAft>
+                <a:spcPts val="600"/>
+              </a:spcAft>
+            </a:pPr>
+            <a:r>
+              <a:rPr sz="1500">
+                <a:solidFill>
+                  <a:srgbClr val="22282E"/>
+                </a:solidFill>
+              </a:rPr>
+              <a:t>•  Hilo (thread): flujo de ejecución dentro de un proceso que comparte su memoria con los demás hilos. Permite concurrencia eficiente, pero el estado compartido abre la puerta a condiciones de carrera y…</a:t>
+            </a:r>
+          </a:p>
+          <a:p>
+            <a:pPr>
+              <a:spcAft>
+                <a:spcPts val="600"/>
+              </a:spcAft>
+            </a:pPr>
+            <a:r>
+              <a:rPr sz="1500">
+                <a:solidFill>
+                  <a:srgbClr val="22282E"/>
+                </a:solidFill>
+              </a:rPr>
+              <a:t>•  Stack (pila): región de memoria LIFO que guarda los marcos de llamada: variables locales, argumentos y la dirección de retorno. Es el objetivo clásico del buffer overflow, ya que sobrescribir la…</a:t>
+            </a:r>
+          </a:p>
+          <a:p>
+            <a:pPr>
+              <a:spcAft>
+                <a:spcPts val="600"/>
+              </a:spcAft>
+            </a:pPr>
+            <a:r>
+              <a:rPr sz="1500">
+                <a:solidFill>
+                  <a:srgbClr val="22282E"/>
+                </a:solidFill>
+              </a:rPr>
+              <a:t>•  Heap: región de memoria dinámica gestionada por el programa mediante malloc/new. Sus errores de gestión (use-after-free, doble liberación, overflow) son una fuente prolífica de vulnerabilidades…</a:t>
+            </a:r>
+          </a:p>
+          <a:p>
+            <a:pPr>
+              <a:spcAft>
+                <a:spcPts val="600"/>
+              </a:spcAft>
+            </a:pPr>
+            <a:r>
+              <a:rPr sz="1500">
+                <a:solidFill>
+                  <a:srgbClr val="22282E"/>
+                </a:solidFill>
+              </a:rPr>
+              <a:t>•  Memoria virtual: abstracción que da a cada proceso un espacio de direcciones propio traducido a memoria física por la MMU. Proporciona aislamiento, permisos por página y es la base de mitigaciones…</a:t>
+            </a:r>
+          </a:p>
+          <a:p>
+            <a:pPr>
+              <a:spcAft>
+                <a:spcPts val="600"/>
+              </a:spcAft>
+            </a:pPr>
+            <a:r>
+              <a:rPr sz="1500">
+                <a:solidFill>
+                  <a:srgbClr val="22282E"/>
+                </a:solidFill>
+              </a:rPr>
+              <a:t>•  Syscall: interfaz controlada por la que un proceso solicita servicios al kernel (open, read, write, execve). Es la única vía legítima para tocar el hardware o los recursos, y por tanto un punto…</a:t>
+            </a:r>
+          </a:p>
+          <a:p>
+            <a:pPr>
+              <a:spcAft>
+                <a:spcPts val="600"/>
+              </a:spcAft>
+            </a:pPr>
+            <a:r>
+              <a:rPr sz="1500">
+                <a:solidFill>
+                  <a:srgbClr val="22282E"/>
+                </a:solidFill>
+              </a:rPr>
+              <a:t>•  Modo usuario / modo kernel: niveles de privilegio de la CPU que separan el código de aplicación del código del kernel. Esta frontera evita que un proceso comprometa el sistema directamente; superarla…</a:t>
             </a:r>
           </a:p>
         </p:txBody>
@@ -4300,7 +4963,7 @@
                   <a:srgbClr val="0B3D2E"/>
                 </a:solidFill>
               </a:rPr>
-              <a:t>🧪 Laboratorio guiado</a:t>
+              <a:t>📔 Glosario</a:t>
             </a:r>
           </a:p>
         </p:txBody>
@@ -4338,97 +5001,97 @@
                   <a:srgbClr val="22282E"/>
                 </a:solidFill>
               </a:rPr>
-              <a:t>•  Explorar un proceso vivo. Lanza sleep 1000 &amp; y examina:</a:t>
-            </a:r>
-          </a:p>
-          <a:p>
-            <a:pPr>
-              <a:spcAft>
-                <a:spcPts val="600"/>
-              </a:spcAft>
-            </a:pPr>
-            <a:r>
-              <a:rPr sz="1500">
-                <a:solidFill>
-                  <a:srgbClr val="22282E"/>
-                </a:solidFill>
-              </a:rPr>
-              <a:t>•  ps -o pid,ppid,state,cmd -p $!</a:t>
-            </a:r>
-          </a:p>
-          <a:p>
-            <a:pPr>
-              <a:spcAft>
-                <a:spcPts val="600"/>
-              </a:spcAft>
-            </a:pPr>
-            <a:r>
-              <a:rPr sz="1500">
-                <a:solidFill>
-                  <a:srgbClr val="22282E"/>
-                </a:solidFill>
-              </a:rPr>
-              <a:t>•  cat /proc/$!/status | head</a:t>
-            </a:r>
-          </a:p>
-          <a:p>
-            <a:pPr>
-              <a:spcAft>
-                <a:spcPts val="600"/>
-              </a:spcAft>
-            </a:pPr>
-            <a:r>
-              <a:rPr sz="1500">
-                <a:solidFill>
-                  <a:srgbClr val="22282E"/>
-                </a:solidFill>
-              </a:rPr>
-              <a:t>•  Layout de memoria. Observa las regiones del proceso:</a:t>
-            </a:r>
-          </a:p>
-          <a:p>
-            <a:pPr>
-              <a:spcAft>
-                <a:spcPts val="600"/>
-              </a:spcAft>
-            </a:pPr>
-            <a:r>
-              <a:rPr sz="1500">
-                <a:solidFill>
-                  <a:srgbClr val="22282E"/>
-                </a:solidFill>
-              </a:rPr>
-              <a:t>•  pmap $!    # o: cat /proc/$!/maps</a:t>
-            </a:r>
-          </a:p>
-          <a:p>
-            <a:pPr>
-              <a:spcAft>
-                <a:spcPts val="600"/>
-              </a:spcAft>
-            </a:pPr>
-            <a:r>
-              <a:rPr sz="1500">
-                <a:solidFill>
-                  <a:srgbClr val="22282E"/>
-                </a:solidFill>
-              </a:rPr>
-              <a:t>•  Identifica stack, heap y las bibliotecas mapeadas.</a:t>
-            </a:r>
-          </a:p>
-          <a:p>
-            <a:pPr>
-              <a:spcAft>
-                <a:spcPts val="600"/>
-              </a:spcAft>
-            </a:pPr>
-            <a:r>
-              <a:rPr sz="1500">
-                <a:solidFill>
-                  <a:srgbClr val="22282E"/>
-                </a:solidFill>
-              </a:rPr>
-              <a:t>•  Trazar syscalls. Mira qué llamadas hace un comando:</a:t>
+              <a:t>•  Término — Definición concisa</a:t>
+            </a:r>
+          </a:p>
+          <a:p>
+            <a:pPr>
+              <a:spcAft>
+                <a:spcPts val="600"/>
+              </a:spcAft>
+            </a:pPr>
+            <a:r>
+              <a:rPr sz="1500">
+                <a:solidFill>
+                  <a:srgbClr val="22282E"/>
+                </a:solidFill>
+              </a:rPr>
+              <a:t>•  Proceso — Programa en ejecución con memoria propia</a:t>
+            </a:r>
+          </a:p>
+          <a:p>
+            <a:pPr>
+              <a:spcAft>
+                <a:spcPts val="600"/>
+              </a:spcAft>
+            </a:pPr>
+            <a:r>
+              <a:rPr sz="1500">
+                <a:solidFill>
+                  <a:srgbClr val="22282E"/>
+                </a:solidFill>
+              </a:rPr>
+              <a:t>•  Hilo — Flujo de ejecución que comparte memoria dentro de un proceso</a:t>
+            </a:r>
+          </a:p>
+          <a:p>
+            <a:pPr>
+              <a:spcAft>
+                <a:spcPts val="600"/>
+              </a:spcAft>
+            </a:pPr>
+            <a:r>
+              <a:rPr sz="1500">
+                <a:solidFill>
+                  <a:srgbClr val="22282E"/>
+                </a:solidFill>
+              </a:rPr>
+              <a:t>•  PID — Identificador numérico de un proceso</a:t>
+            </a:r>
+          </a:p>
+          <a:p>
+            <a:pPr>
+              <a:spcAft>
+                <a:spcPts val="600"/>
+              </a:spcAft>
+            </a:pPr>
+            <a:r>
+              <a:rPr sz="1500">
+                <a:solidFill>
+                  <a:srgbClr val="22282E"/>
+                </a:solidFill>
+              </a:rPr>
+              <a:t>•  Stack — Pila LIFO de marcos de llamada</a:t>
+            </a:r>
+          </a:p>
+          <a:p>
+            <a:pPr>
+              <a:spcAft>
+                <a:spcPts val="600"/>
+              </a:spcAft>
+            </a:pPr>
+            <a:r>
+              <a:rPr sz="1500">
+                <a:solidFill>
+                  <a:srgbClr val="22282E"/>
+                </a:solidFill>
+              </a:rPr>
+              <a:t>•  Heap — Memoria dinámica (malloc/new)</a:t>
+            </a:r>
+          </a:p>
+          <a:p>
+            <a:pPr>
+              <a:spcAft>
+                <a:spcPts val="600"/>
+              </a:spcAft>
+            </a:pPr>
+            <a:r>
+              <a:rPr sz="1500">
+                <a:solidFill>
+                  <a:srgbClr val="22282E"/>
+                </a:solidFill>
+              </a:rPr>
+              <a:t>•  BSS — Segmento de globales sin inicializar</a:t>
             </a:r>
           </a:p>
         </p:txBody>
@@ -4479,7 +5142,7 @@
                   <a:srgbClr val="0B3D2E"/>
                 </a:solidFill>
               </a:rPr>
-              <a:t>✍️ Ejercicios</a:t>
+              <a:t>🧰 Herramientas y preparación</a:t>
             </a:r>
           </a:p>
         </p:txBody>
@@ -4517,82 +5180,7 @@
                   <a:srgbClr val="22282E"/>
                 </a:solidFill>
               </a:rPr>
-              <a:t>•  Dibuja el layout de memoria de un proceso e indica en qué región vive cada tipo de dato.</a:t>
-            </a:r>
-          </a:p>
-          <a:p>
-            <a:pPr>
-              <a:spcAft>
-                <a:spcPts val="600"/>
-              </a:spcAft>
-            </a:pPr>
-            <a:r>
-              <a:rPr sz="1500">
-                <a:solidFill>
-                  <a:srgbClr val="22282E"/>
-                </a:solidFill>
-              </a:rPr>
-              <a:t>•  Explica la diferencia entre proceso e hilo y una implicación de seguridad de cada uno.</a:t>
-            </a:r>
-          </a:p>
-          <a:p>
-            <a:pPr>
-              <a:spcAft>
-                <a:spcPts val="600"/>
-              </a:spcAft>
-            </a:pPr>
-            <a:r>
-              <a:rPr sz="1500">
-                <a:solidFill>
-                  <a:srgbClr val="22282E"/>
-                </a:solidFill>
-              </a:rPr>
-              <a:t>•  Con strace, identifica todas las syscalls que usa un programa para leer un archivo.</a:t>
-            </a:r>
-          </a:p>
-          <a:p>
-            <a:pPr>
-              <a:spcAft>
-                <a:spcPts val="600"/>
-              </a:spcAft>
-            </a:pPr>
-            <a:r>
-              <a:rPr sz="1500">
-                <a:solidFill>
-                  <a:srgbClr val="22282E"/>
-                </a:solidFill>
-              </a:rPr>
-              <a:t>•  Investiga qué es una interrupción/trap y cómo transfiere el control al kernel.</a:t>
-            </a:r>
-          </a:p>
-          <a:p>
-            <a:pPr>
-              <a:spcAft>
-                <a:spcPts val="600"/>
-              </a:spcAft>
-            </a:pPr>
-            <a:r>
-              <a:rPr sz="1500">
-                <a:solidFill>
-                  <a:srgbClr val="22282E"/>
-                </a:solidFill>
-              </a:rPr>
-              <a:t>•  Compara strace y ltrace: ¿qué observa cada uno y para qué sirve en análisis de malware?</a:t>
-            </a:r>
-          </a:p>
-          <a:p>
-            <a:pPr>
-              <a:spcAft>
-                <a:spcPts val="600"/>
-              </a:spcAft>
-            </a:pPr>
-            <a:r>
-              <a:rPr sz="1500">
-                <a:solidFill>
-                  <a:srgbClr val="22282E"/>
-                </a:solidFill>
-              </a:rPr>
-              <a:t>•  Explica por qué la separación usuario/kernel es una frontera de seguridad y qué es una "elevación a kernel".</a:t>
+              <a:t>•  En Linux/Kali usaremos herramientas de observación del propio sistema: ps, top/htop, el sistema de archivos /proc, strace para trazar syscalls, ltrace para llamadas a librería, pmap y cat…</a:t>
             </a:r>
           </a:p>
         </p:txBody>
@@ -4643,7 +5231,7 @@
                   <a:srgbClr val="0B3D2E"/>
                 </a:solidFill>
               </a:rPr>
-              <a:t>📝 Reto verificable</a:t>
+              <a:t>🧪 Laboratorio guiado</a:t>
             </a:r>
           </a:p>
         </p:txBody>
@@ -4681,22 +5269,82 @@
                   <a:srgbClr val="22282E"/>
                 </a:solidFill>
               </a:rPr>
-              <a:t>•  Analiza un binario desconocido (inofensivo, de tu laboratorio) usando solo herramientas de observación de SO: describe su comportamiento a partir de sus syscalls (archivos que abre, red que usa, procesos que lanza) sin ejecutar nada peligroso fuera del entorno aislado. Entrega un informe con el "perfil de comportamiento" del programa.</a:t>
-            </a:r>
-          </a:p>
-          <a:p>
-            <a:pPr>
-              <a:spcAft>
-                <a:spcPts val="600"/>
-              </a:spcAft>
-            </a:pPr>
-            <a:r>
-              <a:rPr sz="1500">
-                <a:solidFill>
-                  <a:srgbClr val="22282E"/>
-                </a:solidFill>
-              </a:rPr>
-              <a:t>•  Criterio de aceptación: el informe lista las syscalls relevantes observadas con strace (E/S de archivos, red, execve) y deduce a partir de ellas qué hace el programa, distinguiendo actividad benigna de indicios sospechosos. Reproducible ejecutando el mismo strace sobre el binario.</a:t>
+              <a:t>•  Explorar un proceso vivo. Lanza un proceso durmiente y examínalo:</a:t>
+            </a:r>
+          </a:p>
+          <a:p>
+            <a:pPr>
+              <a:spcAft>
+                <a:spcPts val="600"/>
+              </a:spcAft>
+            </a:pPr>
+            <a:r>
+              <a:rPr sz="1500">
+                <a:solidFill>
+                  <a:srgbClr val="22282E"/>
+                </a:solidFill>
+              </a:rPr>
+              <a:t>•  Layout de memoria. Observa las regiones del proceso e identifica stack, heap y bibliotecas:</a:t>
+            </a:r>
+          </a:p>
+          <a:p>
+            <a:pPr>
+              <a:spcAft>
+                <a:spcPts val="600"/>
+              </a:spcAft>
+            </a:pPr>
+            <a:r>
+              <a:rPr sz="1500">
+                <a:solidFill>
+                  <a:srgbClr val="22282E"/>
+                </a:solidFill>
+              </a:rPr>
+              <a:t>•  Trazar syscalls. Filtra las llamadas de E/S de archivos de un comando:</a:t>
+            </a:r>
+          </a:p>
+          <a:p>
+            <a:pPr>
+              <a:spcAft>
+                <a:spcPts val="600"/>
+              </a:spcAft>
+            </a:pPr>
+            <a:r>
+              <a:rPr sz="1500">
+                <a:solidFill>
+                  <a:srgbClr val="22282E"/>
+                </a:solidFill>
+              </a:rPr>
+              <a:t>•  Llamadas a librería con ltrace sobre un binario enlazado dinámicamente:</a:t>
+            </a:r>
+          </a:p>
+          <a:p>
+            <a:pPr>
+              <a:spcAft>
+                <a:spcPts val="600"/>
+              </a:spcAft>
+            </a:pPr>
+            <a:r>
+              <a:rPr sz="1500">
+                <a:solidFill>
+                  <a:srgbClr val="22282E"/>
+                </a:solidFill>
+              </a:rPr>
+              <a:t>•  Reparto usuario/kernel. Mide cuánto tiempo pasa un proceso dentro de syscalls frente a espacio de usuario:</a:t>
+            </a:r>
+          </a:p>
+          <a:p>
+            <a:pPr>
+              <a:spcAft>
+                <a:spcPts val="600"/>
+              </a:spcAft>
+            </a:pPr>
+            <a:r>
+              <a:rPr sz="1500">
+                <a:solidFill>
+                  <a:srgbClr val="22282E"/>
+                </a:solidFill>
+              </a:rPr>
+              <a:t>•  Relevancia ofensiva (conceptual). Relaciona lo observado con la seguridad: un buffer overflow corrompe el stack; un execve inesperado en la traza puede delatar una ejecución maliciosa; el hooking de…</a:t>
             </a:r>
           </a:p>
         </p:txBody>
